--- a/skills/pptx-deck/templates/minimal-org/template.pptx
+++ b/skills/pptx-deck/templates/minimal-org/template.pptx
@@ -138,13 +138,21 @@
         </p:nvSpPr>
         <p:spPr>
           <a:xfrm>
-            <a:off x="685800" y="2130425"/>
-            <a:ext cx="7772400" cy="1470025"/>
+            <a:off x="457200" y="365760"/>
+            <a:ext cx="11274552" cy="1051560"/>
           </a:xfrm>
         </p:spPr>
         <p:txBody>
-          <a:bodyPr/>
-          <a:lstStyle/>
+          <a:bodyPr anchor="t"/>
+          <a:lstStyle>
+            <a:lvl1pPr algn="l">
+              <a:defRPr sz="2800" b="1">
+                <a:solidFill>
+                  <a:schemeClr val="dk2"/>
+                </a:solidFill>
+              </a:defRPr>
+            </a:lvl1pPr>
+          </a:lstStyle>
           <a:p>
             <a:r>
               <a:rPr lang="en-US" smtClean="0"/>
@@ -730,13 +738,21 @@
         </p:nvSpPr>
         <p:spPr>
           <a:xfrm>
-            <a:off x="457200" y="274320"/>
+            <a:off x="457200" y="365760"/>
             <a:ext cx="11274552" cy="1051560"/>
           </a:xfrm>
         </p:spPr>
         <p:txBody>
           <a:bodyPr anchor="t"/>
-          <a:lstStyle/>
+          <a:lstStyle>
+            <a:lvl1pPr algn="l">
+              <a:defRPr sz="2800" b="1">
+                <a:solidFill>
+                  <a:schemeClr val="dk2"/>
+                </a:solidFill>
+              </a:defRPr>
+            </a:lvl1pPr>
+          </a:lstStyle>
           <a:p>
             <a:r>
               <a:rPr lang="en-US" smtClean="0"/>
@@ -910,15 +926,19 @@
         </p:nvSpPr>
         <p:spPr>
           <a:xfrm>
-            <a:off x="722313" y="4406900"/>
-            <a:ext cx="7772400" cy="1362075"/>
+            <a:off x="457200" y="365760"/>
+            <a:ext cx="11274552" cy="1051560"/>
           </a:xfrm>
         </p:spPr>
         <p:txBody>
           <a:bodyPr anchor="t"/>
           <a:lstStyle>
             <a:lvl1pPr algn="l">
-              <a:defRPr sz="4000" b="1" cap="all"/>
+              <a:defRPr sz="2800" b="1" cap="all">
+                <a:solidFill>
+                  <a:schemeClr val="dk2"/>
+                </a:solidFill>
+              </a:defRPr>
             </a:lvl1pPr>
           </a:lstStyle>
           <a:p>
@@ -1866,13 +1886,21 @@
         </p:nvSpPr>
         <p:spPr>
           <a:xfrm>
-            <a:off x="457200" y="274320"/>
+            <a:off x="457200" y="365760"/>
             <a:ext cx="11274552" cy="1051560"/>
           </a:xfrm>
         </p:spPr>
         <p:txBody>
           <a:bodyPr anchor="t"/>
-          <a:lstStyle/>
+          <a:lstStyle>
+            <a:lvl1pPr algn="l">
+              <a:defRPr sz="2800" b="1">
+                <a:solidFill>
+                  <a:schemeClr val="dk2"/>
+                </a:solidFill>
+              </a:defRPr>
+            </a:lvl1pPr>
+          </a:lstStyle>
           <a:p>
             <a:r>
               <a:rPr lang="en-US" smtClean="0"/>

--- a/skills/pptx-deck/templates/minimal-org/template.pptx
+++ b/skills/pptx-deck/templates/minimal-org/template.pptx
@@ -138,15 +138,15 @@
         </p:nvSpPr>
         <p:spPr>
           <a:xfrm>
-            <a:off x="457200" y="365760"/>
-            <a:ext cx="11274552" cy="1051560"/>
+            <a:off x="822960" y="2377440"/>
+            <a:ext cx="10515600" cy="685800"/>
           </a:xfrm>
         </p:spPr>
         <p:txBody>
           <a:bodyPr anchor="t"/>
           <a:lstStyle>
             <a:lvl1pPr algn="l">
-              <a:defRPr sz="2800" b="1">
+              <a:defRPr sz="4000" b="1">
                 <a:solidFill>
                   <a:schemeClr val="dk2"/>
                 </a:solidFill>
@@ -174,20 +174,18 @@
         </p:nvSpPr>
         <p:spPr>
           <a:xfrm>
-            <a:off x="1371600" y="3886200"/>
-            <a:ext cx="6400800" cy="1752600"/>
+            <a:off x="822960" y="3172968"/>
+            <a:ext cx="10515600" cy="502920"/>
           </a:xfrm>
         </p:spPr>
         <p:txBody>
-          <a:bodyPr/>
+          <a:bodyPr anchor="t"/>
           <a:lstStyle>
-            <a:lvl1pPr marL="0" indent="0" algn="ctr">
-              <a:buNone/>
-              <a:defRPr>
+            <a:lvl1pPr marL="0" indent="0" algn="l">
+              <a:buNone/>
+              <a:defRPr sz="1800">
                 <a:solidFill>
-                  <a:schemeClr val="tx1">
-                    <a:tint val="75000"/>
-                  </a:schemeClr>
+                  <a:srgbClr val="595F6B"/>
                 </a:solidFill>
               </a:defRPr>
             </a:lvl1pPr>
@@ -344,6 +342,33 @@
             </a:fld>
             <a:endParaRPr lang="en-US"/>
           </a:p>
+        </p:txBody>
+      </p:sp>
+      <p:sp>
+        <p:nvSpPr>
+          <p:cNvPr id="7" name="Title Slide Accent"/>
+          <p:cNvSpPr/>
+          <p:nvPr/>
+        </p:nvSpPr>
+        <p:spPr>
+          <a:xfrm>
+            <a:off x="822960" y="2084831"/>
+            <a:ext cx="1097280" cy="54864"/>
+          </a:xfrm>
+          <a:prstGeom prst="rect">
+            <a:avLst/>
+          </a:prstGeom>
+          <a:solidFill>
+            <a:schemeClr val="accent2"/>
+          </a:solidFill>
+          <a:ln>
+            <a:noFill/>
+          </a:ln>
+        </p:spPr>
+        <p:txBody>
+          <a:bodyPr/>
+          <a:lstStyle/>
+          <a:p/>
         </p:txBody>
       </p:sp>
     </p:spTree>
@@ -926,15 +951,15 @@
         </p:nvSpPr>
         <p:spPr>
           <a:xfrm>
-            <a:off x="457200" y="365760"/>
-            <a:ext cx="11274552" cy="1051560"/>
+            <a:off x="822960" y="2377440"/>
+            <a:ext cx="10515600" cy="685800"/>
           </a:xfrm>
         </p:spPr>
         <p:txBody>
           <a:bodyPr anchor="t"/>
           <a:lstStyle>
             <a:lvl1pPr algn="l">
-              <a:defRPr sz="2800" b="1" cap="all">
+              <a:defRPr sz="4000" b="1" cap="all">
                 <a:solidFill>
                   <a:schemeClr val="dk2"/>
                 </a:solidFill>
@@ -1132,6 +1157,33 @@
             </a:fld>
             <a:endParaRPr lang="en-US"/>
           </a:p>
+        </p:txBody>
+      </p:sp>
+      <p:sp>
+        <p:nvSpPr>
+          <p:cNvPr id="7" name="Section Header Accent"/>
+          <p:cNvSpPr/>
+          <p:nvPr/>
+        </p:nvSpPr>
+        <p:spPr>
+          <a:xfrm>
+            <a:off x="822960" y="2084831"/>
+            <a:ext cx="1097280" cy="54864"/>
+          </a:xfrm>
+          <a:prstGeom prst="rect">
+            <a:avLst/>
+          </a:prstGeom>
+          <a:solidFill>
+            <a:schemeClr val="accent2"/>
+          </a:solidFill>
+          <a:ln>
+            <a:noFill/>
+          </a:ln>
+        </p:spPr>
+        <p:txBody>
+          <a:bodyPr/>
+          <a:lstStyle/>
+          <a:p/>
         </p:txBody>
       </p:sp>
     </p:spTree>
